--- a/paper/SHARP-LLM_A_Framework_for_Vulnerabilitty_Detection_AM.SC.R4CSE25007-PT.pptx
+++ b/paper/SHARP-LLM_A_Framework_for_Vulnerabilitty_Detection_AM.SC.R4CSE25007-PT.pptx
@@ -235,7 +235,7 @@
           <a:p>
             <a:fld id="{C2848B32-384E-4CE1-A037-D20B29FAB1C2}" type="datetimeFigureOut">
               <a:rPr lang="en-US" smtClean="0"/>
-              <a:t>4/24/2026</a:t>
+              <a:t>4/26/2026</a:t>
             </a:fld>
             <a:endParaRPr lang="en-US"/>
           </a:p>
@@ -681,7 +681,7 @@
           <a:p>
             <a:fld id="{5BCAD085-E8A6-8845-BD4E-CB4CCA059FC4}" type="datetimeFigureOut">
               <a:rPr lang="en-US" smtClean="0"/>
-              <a:t>4/24/2026</a:t>
+              <a:t>4/26/2026</a:t>
             </a:fld>
             <a:endParaRPr lang="en-US"/>
           </a:p>
@@ -849,7 +849,7 @@
           <a:p>
             <a:fld id="{5BCAD085-E8A6-8845-BD4E-CB4CCA059FC4}" type="datetimeFigureOut">
               <a:rPr lang="en-US" smtClean="0"/>
-              <a:t>4/24/2026</a:t>
+              <a:t>4/26/2026</a:t>
             </a:fld>
             <a:endParaRPr lang="en-US"/>
           </a:p>
@@ -1027,7 +1027,7 @@
           <a:p>
             <a:fld id="{5BCAD085-E8A6-8845-BD4E-CB4CCA059FC4}" type="datetimeFigureOut">
               <a:rPr lang="en-US" smtClean="0"/>
-              <a:t>4/24/2026</a:t>
+              <a:t>4/26/2026</a:t>
             </a:fld>
             <a:endParaRPr lang="en-US"/>
           </a:p>
@@ -2663,7 +2663,7 @@
           <a:p>
             <a:fld id="{5BCAD085-E8A6-8845-BD4E-CB4CCA059FC4}" type="datetimeFigureOut">
               <a:rPr lang="en-US" smtClean="0"/>
-              <a:t>4/24/2026</a:t>
+              <a:t>4/26/2026</a:t>
             </a:fld>
             <a:endParaRPr lang="en-US"/>
           </a:p>
@@ -2908,7 +2908,7 @@
           <a:p>
             <a:fld id="{5BCAD085-E8A6-8845-BD4E-CB4CCA059FC4}" type="datetimeFigureOut">
               <a:rPr lang="en-US" smtClean="0"/>
-              <a:t>4/24/2026</a:t>
+              <a:t>4/26/2026</a:t>
             </a:fld>
             <a:endParaRPr lang="en-US"/>
           </a:p>
@@ -3193,7 +3193,7 @@
           <a:p>
             <a:fld id="{5BCAD085-E8A6-8845-BD4E-CB4CCA059FC4}" type="datetimeFigureOut">
               <a:rPr lang="en-US" smtClean="0"/>
-              <a:t>4/24/2026</a:t>
+              <a:t>4/26/2026</a:t>
             </a:fld>
             <a:endParaRPr lang="en-US"/>
           </a:p>
@@ -3612,7 +3612,7 @@
           <a:p>
             <a:fld id="{5BCAD085-E8A6-8845-BD4E-CB4CCA059FC4}" type="datetimeFigureOut">
               <a:rPr lang="en-US" smtClean="0"/>
-              <a:t>4/24/2026</a:t>
+              <a:t>4/26/2026</a:t>
             </a:fld>
             <a:endParaRPr lang="en-US"/>
           </a:p>
@@ -3729,7 +3729,7 @@
           <a:p>
             <a:fld id="{5BCAD085-E8A6-8845-BD4E-CB4CCA059FC4}" type="datetimeFigureOut">
               <a:rPr lang="en-US" smtClean="0"/>
-              <a:t>4/24/2026</a:t>
+              <a:t>4/26/2026</a:t>
             </a:fld>
             <a:endParaRPr lang="en-US"/>
           </a:p>
@@ -3824,7 +3824,7 @@
           <a:p>
             <a:fld id="{5BCAD085-E8A6-8845-BD4E-CB4CCA059FC4}" type="datetimeFigureOut">
               <a:rPr lang="en-US" smtClean="0"/>
-              <a:t>4/24/2026</a:t>
+              <a:t>4/26/2026</a:t>
             </a:fld>
             <a:endParaRPr lang="en-US"/>
           </a:p>
@@ -4099,7 +4099,7 @@
           <a:p>
             <a:fld id="{5BCAD085-E8A6-8845-BD4E-CB4CCA059FC4}" type="datetimeFigureOut">
               <a:rPr lang="en-US" smtClean="0"/>
-              <a:t>4/24/2026</a:t>
+              <a:t>4/26/2026</a:t>
             </a:fld>
             <a:endParaRPr lang="en-US"/>
           </a:p>
@@ -4351,7 +4351,7 @@
           <a:p>
             <a:fld id="{5BCAD085-E8A6-8845-BD4E-CB4CCA059FC4}" type="datetimeFigureOut">
               <a:rPr lang="en-US" smtClean="0"/>
-              <a:t>4/24/2026</a:t>
+              <a:t>4/26/2026</a:t>
             </a:fld>
             <a:endParaRPr lang="en-US"/>
           </a:p>
@@ -4562,7 +4562,7 @@
           <a:p>
             <a:fld id="{5BCAD085-E8A6-8845-BD4E-CB4CCA059FC4}" type="datetimeFigureOut">
               <a:rPr lang="en-US" smtClean="0"/>
-              <a:t>4/24/2026</a:t>
+              <a:t>4/26/2026</a:t>
             </a:fld>
             <a:endParaRPr lang="en-US"/>
           </a:p>
@@ -7962,12 +7962,8 @@
               <a:rPr lang="en-US" dirty="0">
                 <a:latin typeface="Calibri"/>
               </a:rPr>
-              <a:t>A Secure and Lightweight Framework for Source Code
-Vulnerability Detection and Risk Prioritization in Healthcare Software</a:t>
-            </a:r>
-          </a:p>
-          <a:p>
-            <a:pPr algn="ctr"/>
+              <a:t>A Secure and Resource-Efficient Framework for Source Code Vulnerability Analysis and Healthcare-Specific Risk Prioritization</a:t>
+            </a:r>
             <a:endParaRPr lang="en-US" dirty="0"/>
           </a:p>
         </p:txBody>
